--- a/Lectures/08.Transformers/Lecture_TNN.pptx
+++ b/Lectures/08.Transformers/Lecture_TNN.pptx
@@ -4739,8 +4739,8 @@
           </a:p>
         </p:txBody>
       </p:sp>
-      <mc:AlternateContent xmlns:mc="http://schemas.openxmlformats.org/markup-compatibility/2006">
-        <mc:Choice xmlns:a14="http://schemas.microsoft.com/office/drawing/2010/main" Requires="a14">
+      <mc:AlternateContent xmlns:mc="http://schemas.openxmlformats.org/markup-compatibility/2006" xmlns:a14="http://schemas.microsoft.com/office/drawing/2010/main">
+        <mc:Choice Requires="a14">
           <p:sp>
             <p:nvSpPr>
               <p:cNvPr id="10" name="Content Placeholder 9">
@@ -5015,7 +5015,7 @@
             </p:txBody>
           </p:sp>
         </mc:Choice>
-        <mc:Fallback>
+        <mc:Fallback xmlns="">
           <p:sp>
             <p:nvSpPr>
               <p:cNvPr id="10" name="Content Placeholder 9">
@@ -5968,8 +5968,8 @@
           <a:chExt cx="0" cy="0"/>
         </a:xfrm>
       </p:grpSpPr>
-      <mc:AlternateContent xmlns:mc="http://schemas.openxmlformats.org/markup-compatibility/2006">
-        <mc:Choice xmlns:a14="http://schemas.microsoft.com/office/drawing/2010/main" Requires="a14">
+      <mc:AlternateContent xmlns:mc="http://schemas.openxmlformats.org/markup-compatibility/2006" xmlns:a14="http://schemas.microsoft.com/office/drawing/2010/main">
+        <mc:Choice Requires="a14">
           <p:sp>
             <p:nvSpPr>
               <p:cNvPr id="10" name="Content Placeholder 9">
@@ -6428,7 +6428,7 @@
             </p:txBody>
           </p:sp>
         </mc:Choice>
-        <mc:Fallback>
+        <mc:Fallback xmlns="">
           <p:sp>
             <p:nvSpPr>
               <p:cNvPr id="10" name="Content Placeholder 9">
@@ -7191,8 +7191,8 @@
                 <a:effectLst/>
               </p:spPr>
             </p:cxnSp>
-            <mc:AlternateContent xmlns:mc="http://schemas.openxmlformats.org/markup-compatibility/2006">
-              <mc:Choice xmlns:a14="http://schemas.microsoft.com/office/drawing/2010/main" Requires="a14">
+            <mc:AlternateContent xmlns:mc="http://schemas.openxmlformats.org/markup-compatibility/2006" xmlns:a14="http://schemas.microsoft.com/office/drawing/2010/main">
+              <mc:Choice Requires="a14">
                 <p:sp>
                   <p:nvSpPr>
                     <p:cNvPr id="19" name="TextBox 18">
@@ -7242,7 +7242,7 @@
                   </p:txBody>
                 </p:sp>
               </mc:Choice>
-              <mc:Fallback>
+              <mc:Fallback xmlns="">
                 <p:sp>
                   <p:nvSpPr>
                     <p:cNvPr id="19" name="TextBox 18">
@@ -8344,8 +8344,8 @@
           <a:chExt cx="0" cy="0"/>
         </a:xfrm>
       </p:grpSpPr>
-      <mc:AlternateContent xmlns:mc="http://schemas.openxmlformats.org/markup-compatibility/2006">
-        <mc:Choice xmlns:a14="http://schemas.microsoft.com/office/drawing/2010/main" Requires="a14">
+      <mc:AlternateContent xmlns:mc="http://schemas.openxmlformats.org/markup-compatibility/2006" xmlns:a14="http://schemas.microsoft.com/office/drawing/2010/main">
+        <mc:Choice Requires="a14">
           <p:sp>
             <p:nvSpPr>
               <p:cNvPr id="10" name="Content Placeholder 9">
@@ -8789,7 +8789,7 @@
             </p:txBody>
           </p:sp>
         </mc:Choice>
-        <mc:Fallback>
+        <mc:Fallback xmlns="">
           <p:sp>
             <p:nvSpPr>
               <p:cNvPr id="10" name="Content Placeholder 9">
@@ -9070,8 +9070,8 @@
           <a:chExt cx="0" cy="0"/>
         </a:xfrm>
       </p:grpSpPr>
-      <mc:AlternateContent xmlns:mc="http://schemas.openxmlformats.org/markup-compatibility/2006">
-        <mc:Choice xmlns:a14="http://schemas.microsoft.com/office/drawing/2010/main" Requires="a14">
+      <mc:AlternateContent xmlns:mc="http://schemas.openxmlformats.org/markup-compatibility/2006" xmlns:a14="http://schemas.microsoft.com/office/drawing/2010/main">
+        <mc:Choice Requires="a14">
           <p:sp>
             <p:nvSpPr>
               <p:cNvPr id="10" name="Content Placeholder 9">
@@ -9764,7 +9764,7 @@
             </p:txBody>
           </p:sp>
         </mc:Choice>
-        <mc:Fallback>
+        <mc:Fallback xmlns="">
           <p:sp>
             <p:nvSpPr>
               <p:cNvPr id="10" name="Content Placeholder 9">
@@ -10077,8 +10077,8 @@
           <a:chExt cx="0" cy="0"/>
         </a:xfrm>
       </p:grpSpPr>
-      <mc:AlternateContent xmlns:mc="http://schemas.openxmlformats.org/markup-compatibility/2006">
-        <mc:Choice xmlns:a14="http://schemas.microsoft.com/office/drawing/2010/main" Requires="a14">
+      <mc:AlternateContent xmlns:mc="http://schemas.openxmlformats.org/markup-compatibility/2006" xmlns:a14="http://schemas.microsoft.com/office/drawing/2010/main">
+        <mc:Choice Requires="a14">
           <p:sp>
             <p:nvSpPr>
               <p:cNvPr id="10" name="Content Placeholder 9">
@@ -10673,7 +10673,7 @@
             </p:txBody>
           </p:sp>
         </mc:Choice>
-        <mc:Fallback>
+        <mc:Fallback xmlns="">
           <p:sp>
             <p:nvSpPr>
               <p:cNvPr id="10" name="Content Placeholder 9">
@@ -14237,8 +14237,8 @@
           <a:chExt cx="0" cy="0"/>
         </a:xfrm>
       </p:grpSpPr>
-      <mc:AlternateContent xmlns:mc="http://schemas.openxmlformats.org/markup-compatibility/2006">
-        <mc:Choice xmlns:a14="http://schemas.microsoft.com/office/drawing/2010/main" Requires="a14">
+      <mc:AlternateContent xmlns:mc="http://schemas.openxmlformats.org/markup-compatibility/2006" xmlns:a14="http://schemas.microsoft.com/office/drawing/2010/main">
+        <mc:Choice Requires="a14">
           <p:sp>
             <p:nvSpPr>
               <p:cNvPr id="10" name="Content Placeholder 9">
@@ -15099,7 +15099,7 @@
             </p:txBody>
           </p:sp>
         </mc:Choice>
-        <mc:Fallback>
+        <mc:Fallback xmlns="">
           <p:sp>
             <p:nvSpPr>
               <p:cNvPr id="10" name="Content Placeholder 9">
@@ -15377,8 +15377,8 @@
           </a:p>
         </p:txBody>
       </p:sp>
-      <mc:AlternateContent xmlns:mc="http://schemas.openxmlformats.org/markup-compatibility/2006">
-        <mc:Choice xmlns:a14="http://schemas.microsoft.com/office/drawing/2010/main" Requires="a14">
+      <mc:AlternateContent xmlns:mc="http://schemas.openxmlformats.org/markup-compatibility/2006" xmlns:a14="http://schemas.microsoft.com/office/drawing/2010/main">
+        <mc:Choice Requires="a14">
           <p:sp>
             <p:nvSpPr>
               <p:cNvPr id="14" name="Content Placeholder 13">
@@ -15740,7 +15740,7 @@
             </p:txBody>
           </p:sp>
         </mc:Choice>
-        <mc:Fallback>
+        <mc:Fallback xmlns="">
           <p:sp>
             <p:nvSpPr>
               <p:cNvPr id="14" name="Content Placeholder 13">
@@ -17767,7 +17767,7 @@
                     <a:latin typeface="Times New Roman" panose="02020603050405020304" pitchFamily="18" charset="0"/>
                     <a:cs typeface="Times New Roman" panose="02020603050405020304" pitchFamily="18" charset="0"/>
                   </a:rPr>
-                  <a:t>, (, </a:t>
+                  <a:t>, </a:t>
                 </a:r>
                 <a:r>
                   <a:rPr lang="en-US" i="1" dirty="0">
@@ -17778,53 +17778,6 @@
                     <a:cs typeface="Times New Roman" panose="02020603050405020304" pitchFamily="18" charset="0"/>
                   </a:rPr>
                   <a:t>g</a:t>
-                </a:r>
-                <a:r>
-                  <a:rPr lang="en-US" dirty="0">
-                    <a:solidFill>
-                      <a:srgbClr val="0033CC"/>
-                    </a:solidFill>
-                    <a:latin typeface="Times New Roman" panose="02020603050405020304" pitchFamily="18" charset="0"/>
-                    <a:cs typeface="Times New Roman" panose="02020603050405020304" pitchFamily="18" charset="0"/>
-                  </a:rPr>
-                  <a:t>, </a:t>
-                </a:r>
-                <a:r>
-                  <a:rPr lang="en-US" i="1" dirty="0">
-                    <a:solidFill>
-                      <a:srgbClr val="0033CC"/>
-                    </a:solidFill>
-                    <a:latin typeface="Times New Roman" panose="02020603050405020304" pitchFamily="18" charset="0"/>
-                    <a:cs typeface="Times New Roman" panose="02020603050405020304" pitchFamily="18" charset="0"/>
-                  </a:rPr>
-                  <a:t>x</a:t>
-                </a:r>
-                <a:r>
-                  <a:rPr lang="en-US" dirty="0">
-                    <a:solidFill>
-                      <a:srgbClr val="0033CC"/>
-                    </a:solidFill>
-                    <a:latin typeface="Times New Roman" panose="02020603050405020304" pitchFamily="18" charset="0"/>
-                    <a:cs typeface="Times New Roman" panose="02020603050405020304" pitchFamily="18" charset="0"/>
-                  </a:rPr>
-                  <a:t>, </a:t>
-                </a:r>
-                <a:r>
-                  <a:rPr lang="en-US" dirty="0">
-                    <a:latin typeface="Times New Roman" panose="02020603050405020304" pitchFamily="18" charset="0"/>
-                    <a:cs typeface="Times New Roman" panose="02020603050405020304" pitchFamily="18" charset="0"/>
-                  </a:rPr>
-                  <a:t>and</a:t>
-                </a:r>
-                <a:r>
-                  <a:rPr lang="en-US" dirty="0">
-                    <a:solidFill>
-                      <a:srgbClr val="0033CC"/>
-                    </a:solidFill>
-                    <a:latin typeface="Times New Roman" panose="02020603050405020304" pitchFamily="18" charset="0"/>
-                    <a:cs typeface="Times New Roman" panose="02020603050405020304" pitchFamily="18" charset="0"/>
-                  </a:rPr>
-                  <a:t> )</a:t>
                 </a:r>
                 <a:r>
                   <a:rPr lang="en-US" dirty="0">
@@ -18039,8 +17992,8 @@
           </a:p>
         </p:txBody>
       </p:sp>
-      <mc:AlternateContent xmlns:mc="http://schemas.openxmlformats.org/markup-compatibility/2006">
-        <mc:Choice xmlns:a14="http://schemas.microsoft.com/office/drawing/2010/main" Requires="a14">
+      <mc:AlternateContent xmlns:mc="http://schemas.openxmlformats.org/markup-compatibility/2006" xmlns:a14="http://schemas.microsoft.com/office/drawing/2010/main">
+        <mc:Choice Requires="a14">
           <p:sp>
             <p:nvSpPr>
               <p:cNvPr id="10" name="Content Placeholder 9">
@@ -18284,127 +18237,7 @@
                         <a:latin typeface="Cambria Math" panose="02040503050406030204" pitchFamily="18" charset="0"/>
                         <a:cs typeface="Times New Roman" panose="02020603050405020304" pitchFamily="18" charset="0"/>
                       </a:rPr>
-                      <m:t>=34, 3, 29, 36,</m:t>
-                    </m:r>
-                    <m:r>
-                      <a:rPr lang="en-US" b="0" i="1" smtClean="0">
-                        <a:solidFill>
-                          <a:srgbClr val="0033CC"/>
-                        </a:solidFill>
-                        <a:latin typeface="Cambria Math" panose="02040503050406030204" pitchFamily="18" charset="0"/>
-                        <a:cs typeface="Times New Roman" panose="02020603050405020304" pitchFamily="18" charset="0"/>
-                      </a:rPr>
-                      <m:t> </m:t>
-                    </m:r>
-                    <m:r>
-                      <a:rPr lang="en-US" b="0" i="1" smtClean="0">
-                        <a:solidFill>
-                          <a:srgbClr val="0033CC"/>
-                        </a:solidFill>
-                        <a:latin typeface="Cambria Math" panose="02040503050406030204" pitchFamily="18" charset="0"/>
-                        <a:cs typeface="Times New Roman" panose="02020603050405020304" pitchFamily="18" charset="0"/>
-                      </a:rPr>
-                      <m:t>4, 7,</m:t>
-                    </m:r>
-                    <m:r>
-                      <a:rPr lang="en-US" b="0" i="1" smtClean="0">
-                        <a:solidFill>
-                          <a:srgbClr val="0033CC"/>
-                        </a:solidFill>
-                        <a:latin typeface="Cambria Math" panose="02040503050406030204" pitchFamily="18" charset="0"/>
-                        <a:cs typeface="Times New Roman" panose="02020603050405020304" pitchFamily="18" charset="0"/>
-                      </a:rPr>
-                      <m:t> </m:t>
-                    </m:r>
-                    <m:r>
-                      <a:rPr lang="en-US" b="0" i="1" smtClean="0">
-                        <a:solidFill>
-                          <a:srgbClr val="0033CC"/>
-                        </a:solidFill>
-                        <a:latin typeface="Cambria Math" panose="02040503050406030204" pitchFamily="18" charset="0"/>
-                        <a:cs typeface="Times New Roman" panose="02020603050405020304" pitchFamily="18" charset="0"/>
-                      </a:rPr>
-                      <m:t>33,</m:t>
-                    </m:r>
-                    <m:r>
-                      <a:rPr lang="en-US" b="0" i="1" smtClean="0">
-                        <a:solidFill>
-                          <a:srgbClr val="0033CC"/>
-                        </a:solidFill>
-                        <a:latin typeface="Cambria Math" panose="02040503050406030204" pitchFamily="18" charset="0"/>
-                        <a:cs typeface="Times New Roman" panose="02020603050405020304" pitchFamily="18" charset="0"/>
-                      </a:rPr>
-                      <m:t> </m:t>
-                    </m:r>
-                    <m:r>
-                      <a:rPr lang="en-US" b="0" i="1" smtClean="0">
-                        <a:solidFill>
-                          <a:srgbClr val="0033CC"/>
-                        </a:solidFill>
-                        <a:latin typeface="Cambria Math" panose="02040503050406030204" pitchFamily="18" charset="0"/>
-                        <a:cs typeface="Times New Roman" panose="02020603050405020304" pitchFamily="18" charset="0"/>
-                      </a:rPr>
-                      <m:t>3,</m:t>
-                    </m:r>
-                    <m:r>
-                      <a:rPr lang="en-US" b="0" i="1" smtClean="0">
-                        <a:solidFill>
-                          <a:srgbClr val="0033CC"/>
-                        </a:solidFill>
-                        <a:latin typeface="Cambria Math" panose="02040503050406030204" pitchFamily="18" charset="0"/>
-                        <a:cs typeface="Times New Roman" panose="02020603050405020304" pitchFamily="18" charset="0"/>
-                      </a:rPr>
-                      <m:t> </m:t>
-                    </m:r>
-                    <m:r>
-                      <a:rPr lang="en-US" b="0" i="1" smtClean="0">
-                        <a:solidFill>
-                          <a:srgbClr val="0033CC"/>
-                        </a:solidFill>
-                        <a:latin typeface="Cambria Math" panose="02040503050406030204" pitchFamily="18" charset="0"/>
-                        <a:cs typeface="Times New Roman" panose="02020603050405020304" pitchFamily="18" charset="0"/>
-                      </a:rPr>
-                      <m:t>28,</m:t>
-                    </m:r>
-                    <m:r>
-                      <a:rPr lang="en-US" b="0" i="1" smtClean="0">
-                        <a:solidFill>
-                          <a:srgbClr val="0033CC"/>
-                        </a:solidFill>
-                        <a:latin typeface="Cambria Math" panose="02040503050406030204" pitchFamily="18" charset="0"/>
-                        <a:cs typeface="Times New Roman" panose="02020603050405020304" pitchFamily="18" charset="0"/>
-                      </a:rPr>
-                      <m:t> </m:t>
-                    </m:r>
-                    <m:r>
-                      <a:rPr lang="en-US" b="0" i="1" smtClean="0">
-                        <a:solidFill>
-                          <a:srgbClr val="0033CC"/>
-                        </a:solidFill>
-                        <a:latin typeface="Cambria Math" panose="02040503050406030204" pitchFamily="18" charset="0"/>
-                        <a:cs typeface="Times New Roman" panose="02020603050405020304" pitchFamily="18" charset="0"/>
-                      </a:rPr>
-                      <m:t>36,</m:t>
-                    </m:r>
-                    <m:r>
-                      <a:rPr lang="en-US" b="0" i="1" smtClean="0">
-                        <a:solidFill>
-                          <a:srgbClr val="0033CC"/>
-                        </a:solidFill>
-                        <a:latin typeface="Cambria Math" panose="02040503050406030204" pitchFamily="18" charset="0"/>
-                        <a:cs typeface="Times New Roman" panose="02020603050405020304" pitchFamily="18" charset="0"/>
-                      </a:rPr>
-                      <m:t> </m:t>
-                    </m:r>
-                    <m:r>
-                      <a:rPr lang="en-US" b="0" i="1" smtClean="0">
-                        <a:solidFill>
-                          <a:srgbClr val="0033CC"/>
-                        </a:solidFill>
-                        <a:latin typeface="Cambria Math" panose="02040503050406030204" pitchFamily="18" charset="0"/>
-                        <a:cs typeface="Times New Roman" panose="02020603050405020304" pitchFamily="18" charset="0"/>
-                      </a:rPr>
-                      <m:t>4</m:t>
+                      <m:t>=34, 3, 29, 36, 4, 7, 33, 3, 28, 36, 4</m:t>
                     </m:r>
                   </m:oMath>
                 </a14:m>
@@ -18416,7 +18249,7 @@
             </p:txBody>
           </p:sp>
         </mc:Choice>
-        <mc:Fallback>
+        <mc:Fallback xmlns="">
           <p:sp>
             <p:nvSpPr>
               <p:cNvPr id="10" name="Content Placeholder 9">
@@ -18567,8 +18400,8 @@
           </a:p>
         </p:txBody>
       </p:sp>
-      <mc:AlternateContent xmlns:mc="http://schemas.openxmlformats.org/markup-compatibility/2006">
-        <mc:Choice xmlns:a14="http://schemas.microsoft.com/office/drawing/2010/main" Requires="a14">
+      <mc:AlternateContent xmlns:mc="http://schemas.openxmlformats.org/markup-compatibility/2006" xmlns:a14="http://schemas.microsoft.com/office/drawing/2010/main">
+        <mc:Choice Requires="a14">
           <p:sp>
             <p:nvSpPr>
               <p:cNvPr id="10" name="Content Placeholder 9">
@@ -19152,7 +18985,7 @@
             </p:txBody>
           </p:sp>
         </mc:Choice>
-        <mc:Fallback>
+        <mc:Fallback xmlns="">
           <p:sp>
             <p:nvSpPr>
               <p:cNvPr id="10" name="Content Placeholder 9">
@@ -19307,8 +19140,8 @@
           </a:p>
         </p:txBody>
       </p:sp>
-      <mc:AlternateContent xmlns:mc="http://schemas.openxmlformats.org/markup-compatibility/2006">
-        <mc:Choice xmlns:a14="http://schemas.microsoft.com/office/drawing/2010/main" Requires="a14">
+      <mc:AlternateContent xmlns:mc="http://schemas.openxmlformats.org/markup-compatibility/2006" xmlns:a14="http://schemas.microsoft.com/office/drawing/2010/main">
+        <mc:Choice Requires="a14">
           <p:sp>
             <p:nvSpPr>
               <p:cNvPr id="10" name="Content Placeholder 9">
@@ -19526,7 +19359,7 @@
             </p:txBody>
           </p:sp>
         </mc:Choice>
-        <mc:Fallback>
+        <mc:Fallback xmlns="">
           <p:sp>
             <p:nvSpPr>
               <p:cNvPr id="10" name="Content Placeholder 9">
